--- a/재정학/01_Lectures/재정학_Chapter_6.pptx
+++ b/재정학/01_Lectures/재정학_Chapter_6.pptx
@@ -250,7 +250,7 @@
           <a:p>
             <a:fld id="{4A5E00EF-AEA4-43E2-9451-8F9C59A39471}" type="datetimeFigureOut">
               <a:rPr lang="ko-KR" altLang="en-US" smtClean="0"/>
-              <a:t>2026-03-06</a:t>
+              <a:t>2026-04-22</a:t>
             </a:fld>
             <a:endParaRPr lang="ko-KR" altLang="en-US"/>
           </a:p>
@@ -672,7 +672,7 @@
           <a:p>
             <a:fld id="{CD32C56F-BD27-4999-9E6D-D4EACE3DA9F4}" type="datetime1">
               <a:rPr lang="ko-KR" altLang="en-US" smtClean="0"/>
-              <a:t>2026-03-06</a:t>
+              <a:t>2026-04-22</a:t>
             </a:fld>
             <a:endParaRPr lang="ko-KR" altLang="en-US"/>
           </a:p>
@@ -886,7 +886,7 @@
           <a:p>
             <a:fld id="{8EF4A19C-72C8-45CA-8E3F-68A7FA345D6C}" type="datetime1">
               <a:rPr lang="ko-KR" altLang="en-US" smtClean="0"/>
-              <a:t>2026-03-06</a:t>
+              <a:t>2026-04-22</a:t>
             </a:fld>
             <a:endParaRPr lang="ko-KR" altLang="en-US"/>
           </a:p>
@@ -1110,7 +1110,7 @@
           <a:p>
             <a:fld id="{56A175B2-010B-4341-954C-5F8F5C70B124}" type="datetime1">
               <a:rPr lang="ko-KR" altLang="en-US" smtClean="0"/>
-              <a:t>2026-03-06</a:t>
+              <a:t>2026-04-22</a:t>
             </a:fld>
             <a:endParaRPr lang="ko-KR" altLang="en-US"/>
           </a:p>
@@ -1324,7 +1324,7 @@
           <a:p>
             <a:fld id="{16B83F9E-22C9-45CA-9E85-070F1D3EF530}" type="datetime1">
               <a:rPr lang="ko-KR" altLang="en-US" smtClean="0"/>
-              <a:t>2026-03-06</a:t>
+              <a:t>2026-04-22</a:t>
             </a:fld>
             <a:endParaRPr lang="ko-KR" altLang="en-US"/>
           </a:p>
@@ -1615,7 +1615,7 @@
           <a:p>
             <a:fld id="{03278F45-FB3C-4C4D-B89A-7BC3F5F229F6}" type="datetime1">
               <a:rPr lang="ko-KR" altLang="en-US" smtClean="0"/>
-              <a:t>2026-03-06</a:t>
+              <a:t>2026-04-22</a:t>
             </a:fld>
             <a:endParaRPr lang="ko-KR" altLang="en-US"/>
           </a:p>
@@ -2008,7 +2008,7 @@
           <a:p>
             <a:fld id="{38FDAC3C-35A6-415C-9F03-738A6AC328B1}" type="datetime1">
               <a:rPr lang="ko-KR" altLang="en-US" smtClean="0"/>
-              <a:t>2026-03-06</a:t>
+              <a:t>2026-04-22</a:t>
             </a:fld>
             <a:endParaRPr lang="ko-KR" altLang="en-US"/>
           </a:p>
@@ -3602,7 +3602,7 @@
           <a:p>
             <a:fld id="{507A0DF1-AEE6-4B0D-89D2-351E7B3EF65C}" type="datetime1">
               <a:rPr lang="ko-KR" altLang="en-US" smtClean="0"/>
-              <a:t>2026-03-06</a:t>
+              <a:t>2026-04-22</a:t>
             </a:fld>
             <a:endParaRPr lang="ko-KR" altLang="en-US"/>
           </a:p>
@@ -4030,7 +4030,7 @@
           <a:p>
             <a:fld id="{CA93B8C9-630F-4D57-944D-04FD37CECCD3}" type="datetime1">
               <a:rPr lang="ko-KR" altLang="en-US" smtClean="0"/>
-              <a:t>2026-03-06</a:t>
+              <a:t>2026-04-22</a:t>
             </a:fld>
             <a:endParaRPr lang="ko-KR" altLang="en-US"/>
           </a:p>
@@ -4187,7 +4187,7 @@
           <a:p>
             <a:fld id="{E986165A-AC43-4902-9541-874ECD310BA3}" type="datetime1">
               <a:rPr lang="ko-KR" altLang="en-US" smtClean="0"/>
-              <a:t>2026-03-06</a:t>
+              <a:t>2026-04-22</a:t>
             </a:fld>
             <a:endParaRPr lang="ko-KR" altLang="en-US"/>
           </a:p>
@@ -4514,7 +4514,7 @@
           <a:p>
             <a:fld id="{47E6EE6D-2B0E-43A9-87A2-7354CDB998F4}" type="datetime1">
               <a:rPr lang="ko-KR" altLang="en-US" smtClean="0"/>
-              <a:t>2026-03-06</a:t>
+              <a:t>2026-04-22</a:t>
             </a:fld>
             <a:endParaRPr lang="ko-KR" altLang="en-US"/>
           </a:p>
@@ -4818,7 +4818,7 @@
           <a:p>
             <a:fld id="{5CC5944E-0BC8-4FAA-9F94-6B4B05834E10}" type="datetime1">
               <a:rPr lang="ko-KR" altLang="en-US" smtClean="0"/>
-              <a:t>2026-03-06</a:t>
+              <a:t>2026-04-22</a:t>
             </a:fld>
             <a:endParaRPr lang="ko-KR" altLang="en-US"/>
           </a:p>
@@ -10207,8 +10207,8 @@
           </a:p>
         </p:txBody>
       </p:sp>
-      <mc:AlternateContent xmlns:mc="http://schemas.openxmlformats.org/markup-compatibility/2006" xmlns:a14="http://schemas.microsoft.com/office/drawing/2010/main">
-        <mc:Choice Requires="a14">
+      <mc:AlternateContent xmlns:mc="http://schemas.openxmlformats.org/markup-compatibility/2006">
+        <mc:Choice xmlns:a14="http://schemas.microsoft.com/office/drawing/2010/main" Requires="a14">
           <p:sp>
             <p:nvSpPr>
               <p:cNvPr id="5" name="TextBox 4">
@@ -10565,7 +10565,13 @@
                           <a:rPr lang="en-US" altLang="ko-KR" sz="1600" b="0" i="1" spc="-50" smtClean="0">
                             <a:latin typeface="Cambria Math" panose="02040503050406030204" pitchFamily="18" charset="0"/>
                           </a:rPr>
-                          <m:t>𝑃𝑀𝑇</m:t>
+                          <m:t>𝑃𝑀</m:t>
+                        </m:r>
+                        <m:r>
+                          <a:rPr lang="en-US" altLang="ko-KR" sz="1600" b="0" i="1" spc="-50" smtClean="0">
+                            <a:latin typeface="Cambria Math" panose="02040503050406030204" pitchFamily="18" charset="0"/>
+                          </a:rPr>
+                          <m:t>𝐶</m:t>
                         </m:r>
                       </m:e>
                       <m:sub>
@@ -10691,7 +10697,7 @@
             </p:txBody>
           </p:sp>
         </mc:Choice>
-        <mc:Fallback xmlns="">
+        <mc:Fallback>
           <p:sp>
             <p:nvSpPr>
               <p:cNvPr id="5" name="TextBox 4">
@@ -15685,8 +15691,8 @@
           </a:p>
         </p:txBody>
       </p:sp>
-      <mc:AlternateContent xmlns:mc="http://schemas.openxmlformats.org/markup-compatibility/2006">
-        <mc:Choice xmlns:a14="http://schemas.microsoft.com/office/drawing/2010/main" Requires="a14">
+      <mc:AlternateContent xmlns:mc="http://schemas.openxmlformats.org/markup-compatibility/2006" xmlns:a14="http://schemas.microsoft.com/office/drawing/2010/main">
+        <mc:Choice Requires="a14">
           <p:sp>
             <p:nvSpPr>
               <p:cNvPr id="5" name="TextBox 4">
@@ -15892,7 +15898,7 @@
             </p:txBody>
           </p:sp>
         </mc:Choice>
-        <mc:Fallback>
+        <mc:Fallback xmlns="">
           <p:sp>
             <p:nvSpPr>
               <p:cNvPr id="5" name="TextBox 4">
@@ -16115,8 +16121,8 @@
           </a:prstGeom>
         </p:spPr>
       </p:pic>
-      <mc:AlternateContent xmlns:mc="http://schemas.openxmlformats.org/markup-compatibility/2006">
-        <mc:Choice xmlns:a14="http://schemas.microsoft.com/office/drawing/2010/main" Requires="a14">
+      <mc:AlternateContent xmlns:mc="http://schemas.openxmlformats.org/markup-compatibility/2006" xmlns:a14="http://schemas.microsoft.com/office/drawing/2010/main">
+        <mc:Choice Requires="a14">
           <p:sp>
             <p:nvSpPr>
               <p:cNvPr id="9" name="TextBox 8">
@@ -16271,7 +16277,7 @@
             </p:txBody>
           </p:sp>
         </mc:Choice>
-        <mc:Fallback>
+        <mc:Fallback xmlns="">
           <p:sp>
             <p:nvSpPr>
               <p:cNvPr id="9" name="TextBox 8">
@@ -17498,15 +17504,7 @@
             </a:r>
             <a:r>
               <a:rPr lang="ko-KR" altLang="en-US" sz="1600" spc="-50" dirty="0"/>
-              <a:t>어떤 </a:t>
-            </a:r>
-            <a:r>
-              <a:rPr lang="ko-KR" altLang="en-US" sz="1600" spc="-50" dirty="0" err="1"/>
-              <a:t>행외가</a:t>
-            </a:r>
-            <a:r>
-              <a:rPr lang="ko-KR" altLang="en-US" sz="1600" spc="-50" dirty="0"/>
-              <a:t> 제</a:t>
+              <a:t>어떤 행위가 제</a:t>
             </a:r>
             <a:r>
               <a:rPr lang="en-US" altLang="ko-KR" sz="1600" spc="-50" dirty="0"/>
@@ -18233,28 +18231,28 @@
               <a:buChar char="ü"/>
             </a:pPr>
             <a:r>
+              <a:rPr lang="ko-KR" altLang="en-US" sz="1600" spc="-50" dirty="0"/>
+              <a:t>공공재적 </a:t>
+            </a:r>
+            <a:r>
+              <a:rPr lang="ko-KR" altLang="en-US" sz="1600" spc="-50" dirty="0" err="1"/>
+              <a:t>외부성</a:t>
+            </a:r>
+            <a:r>
+              <a:rPr lang="ko-KR" altLang="en-US" sz="1600" spc="-50" dirty="0"/>
+              <a:t> </a:t>
+            </a:r>
+            <a:r>
+              <a:rPr lang="en-US" altLang="ko-KR" sz="1600" spc="-50" dirty="0"/>
+              <a:t>vs. </a:t>
+            </a:r>
+            <a:r>
               <a:rPr lang="ko-KR" altLang="en-US" sz="1600" spc="-50" dirty="0" err="1"/>
               <a:t>사용재적</a:t>
             </a:r>
             <a:r>
               <a:rPr lang="ko-KR" altLang="en-US" sz="1600" spc="-50" dirty="0"/>
               <a:t> </a:t>
-            </a:r>
-            <a:r>
-              <a:rPr lang="ko-KR" altLang="en-US" sz="1600" spc="-50" dirty="0" err="1"/>
-              <a:t>외부성</a:t>
-            </a:r>
-            <a:r>
-              <a:rPr lang="ko-KR" altLang="en-US" sz="1600" spc="-50" dirty="0"/>
-              <a:t> </a:t>
-            </a:r>
-            <a:r>
-              <a:rPr lang="en-US" altLang="ko-KR" sz="1600" spc="-50" dirty="0"/>
-              <a:t>vs. </a:t>
-            </a:r>
-            <a:r>
-              <a:rPr lang="ko-KR" altLang="en-US" sz="1600" spc="-50" dirty="0"/>
-              <a:t>공공재적 </a:t>
             </a:r>
             <a:r>
               <a:rPr lang="ko-KR" altLang="en-US" sz="1600" spc="-50" dirty="0" err="1"/>

--- a/재정학/01_Lectures/재정학_Chapter_6.pptx
+++ b/재정학/01_Lectures/재정학_Chapter_6.pptx
@@ -250,7 +250,7 @@
           <a:p>
             <a:fld id="{4A5E00EF-AEA4-43E2-9451-8F9C59A39471}" type="datetimeFigureOut">
               <a:rPr lang="ko-KR" altLang="en-US" smtClean="0"/>
-              <a:t>2026-04-22</a:t>
+              <a:t>2026-04-23</a:t>
             </a:fld>
             <a:endParaRPr lang="ko-KR" altLang="en-US"/>
           </a:p>
@@ -672,7 +672,7 @@
           <a:p>
             <a:fld id="{CD32C56F-BD27-4999-9E6D-D4EACE3DA9F4}" type="datetime1">
               <a:rPr lang="ko-KR" altLang="en-US" smtClean="0"/>
-              <a:t>2026-04-22</a:t>
+              <a:t>2026-04-23</a:t>
             </a:fld>
             <a:endParaRPr lang="ko-KR" altLang="en-US"/>
           </a:p>
@@ -886,7 +886,7 @@
           <a:p>
             <a:fld id="{8EF4A19C-72C8-45CA-8E3F-68A7FA345D6C}" type="datetime1">
               <a:rPr lang="ko-KR" altLang="en-US" smtClean="0"/>
-              <a:t>2026-04-22</a:t>
+              <a:t>2026-04-23</a:t>
             </a:fld>
             <a:endParaRPr lang="ko-KR" altLang="en-US"/>
           </a:p>
@@ -1110,7 +1110,7 @@
           <a:p>
             <a:fld id="{56A175B2-010B-4341-954C-5F8F5C70B124}" type="datetime1">
               <a:rPr lang="ko-KR" altLang="en-US" smtClean="0"/>
-              <a:t>2026-04-22</a:t>
+              <a:t>2026-04-23</a:t>
             </a:fld>
             <a:endParaRPr lang="ko-KR" altLang="en-US"/>
           </a:p>
@@ -1324,7 +1324,7 @@
           <a:p>
             <a:fld id="{16B83F9E-22C9-45CA-9E85-070F1D3EF530}" type="datetime1">
               <a:rPr lang="ko-KR" altLang="en-US" smtClean="0"/>
-              <a:t>2026-04-22</a:t>
+              <a:t>2026-04-23</a:t>
             </a:fld>
             <a:endParaRPr lang="ko-KR" altLang="en-US"/>
           </a:p>
@@ -1615,7 +1615,7 @@
           <a:p>
             <a:fld id="{03278F45-FB3C-4C4D-B89A-7BC3F5F229F6}" type="datetime1">
               <a:rPr lang="ko-KR" altLang="en-US" smtClean="0"/>
-              <a:t>2026-04-22</a:t>
+              <a:t>2026-04-23</a:t>
             </a:fld>
             <a:endParaRPr lang="ko-KR" altLang="en-US"/>
           </a:p>
@@ -2008,7 +2008,7 @@
           <a:p>
             <a:fld id="{38FDAC3C-35A6-415C-9F03-738A6AC328B1}" type="datetime1">
               <a:rPr lang="ko-KR" altLang="en-US" smtClean="0"/>
-              <a:t>2026-04-22</a:t>
+              <a:t>2026-04-23</a:t>
             </a:fld>
             <a:endParaRPr lang="ko-KR" altLang="en-US"/>
           </a:p>
@@ -3602,7 +3602,7 @@
           <a:p>
             <a:fld id="{507A0DF1-AEE6-4B0D-89D2-351E7B3EF65C}" type="datetime1">
               <a:rPr lang="ko-KR" altLang="en-US" smtClean="0"/>
-              <a:t>2026-04-22</a:t>
+              <a:t>2026-04-23</a:t>
             </a:fld>
             <a:endParaRPr lang="ko-KR" altLang="en-US"/>
           </a:p>
@@ -4030,7 +4030,7 @@
           <a:p>
             <a:fld id="{CA93B8C9-630F-4D57-944D-04FD37CECCD3}" type="datetime1">
               <a:rPr lang="ko-KR" altLang="en-US" smtClean="0"/>
-              <a:t>2026-04-22</a:t>
+              <a:t>2026-04-23</a:t>
             </a:fld>
             <a:endParaRPr lang="ko-KR" altLang="en-US"/>
           </a:p>
@@ -4187,7 +4187,7 @@
           <a:p>
             <a:fld id="{E986165A-AC43-4902-9541-874ECD310BA3}" type="datetime1">
               <a:rPr lang="ko-KR" altLang="en-US" smtClean="0"/>
-              <a:t>2026-04-22</a:t>
+              <a:t>2026-04-23</a:t>
             </a:fld>
             <a:endParaRPr lang="ko-KR" altLang="en-US"/>
           </a:p>
@@ -4514,7 +4514,7 @@
           <a:p>
             <a:fld id="{47E6EE6D-2B0E-43A9-87A2-7354CDB998F4}" type="datetime1">
               <a:rPr lang="ko-KR" altLang="en-US" smtClean="0"/>
-              <a:t>2026-04-22</a:t>
+              <a:t>2026-04-23</a:t>
             </a:fld>
             <a:endParaRPr lang="ko-KR" altLang="en-US"/>
           </a:p>
@@ -4818,7 +4818,7 @@
           <a:p>
             <a:fld id="{5CC5944E-0BC8-4FAA-9F94-6B4B05834E10}" type="datetime1">
               <a:rPr lang="ko-KR" altLang="en-US" smtClean="0"/>
-              <a:t>2026-04-22</a:t>
+              <a:t>2026-04-23</a:t>
             </a:fld>
             <a:endParaRPr lang="ko-KR" altLang="en-US"/>
           </a:p>
@@ -10207,8 +10207,8 @@
           </a:p>
         </p:txBody>
       </p:sp>
-      <mc:AlternateContent xmlns:mc="http://schemas.openxmlformats.org/markup-compatibility/2006">
-        <mc:Choice xmlns:a14="http://schemas.microsoft.com/office/drawing/2010/main" Requires="a14">
+      <mc:AlternateContent xmlns:mc="http://schemas.openxmlformats.org/markup-compatibility/2006" xmlns:a14="http://schemas.microsoft.com/office/drawing/2010/main">
+        <mc:Choice Requires="a14">
           <p:sp>
             <p:nvSpPr>
               <p:cNvPr id="5" name="TextBox 4">
@@ -10565,13 +10565,7 @@
                           <a:rPr lang="en-US" altLang="ko-KR" sz="1600" b="0" i="1" spc="-50" smtClean="0">
                             <a:latin typeface="Cambria Math" panose="02040503050406030204" pitchFamily="18" charset="0"/>
                           </a:rPr>
-                          <m:t>𝑃𝑀</m:t>
-                        </m:r>
-                        <m:r>
-                          <a:rPr lang="en-US" altLang="ko-KR" sz="1600" b="0" i="1" spc="-50" smtClean="0">
-                            <a:latin typeface="Cambria Math" panose="02040503050406030204" pitchFamily="18" charset="0"/>
-                          </a:rPr>
-                          <m:t>𝐶</m:t>
+                          <m:t>𝑃𝑀𝐶</m:t>
                         </m:r>
                       </m:e>
                       <m:sub>
@@ -10697,7 +10691,7 @@
             </p:txBody>
           </p:sp>
         </mc:Choice>
-        <mc:Fallback>
+        <mc:Fallback xmlns="">
           <p:sp>
             <p:nvSpPr>
               <p:cNvPr id="5" name="TextBox 4">
